--- a/test/pptx/speaker-notes-after-metadata/templated.pptx
+++ b/test/pptx/speaker-notes-after-metadata/templated.pptx
@@ -539,6 +539,9 @@
       </p:sp>
     </p:spTree>
   </p:cSld>
+  <p:clrMapOvr>
+    <a:masterClrMapping/>
+  </p:clrMapOvr>
 </p:notes>
 </file>
 
